--- a/adval-mbo/あどばるMBO_ご提案_20260924.pptx
+++ b/adval-mbo/あどばるMBO_ご提案_20260924.pptx
@@ -2980,7 +2980,7 @@
                 <a:ea typeface="Meiryo" pitchFamily="34" charset="-122"/>
                 <a:cs typeface="Meiryo" pitchFamily="34" charset="-120"/>
               </a:rPr>
-              <a:t>中野ファンド6.12億・パートナー13.44億。払込により債務超過が解消します。</a:t>
+              <a:t>中野ファンド6.10億・パートナー13.47億。払込により債務超過が解消します。</a:t>
             </a:r>
             <a:endParaRPr lang="en-US" sz="950" dirty="0"/>
           </a:p>
@@ -4532,7 +4532,7 @@
                 <a:ea typeface="Meiryo" pitchFamily="34" charset="-122"/>
                 <a:cs typeface="Meiryo" pitchFamily="34" charset="-120"/>
               </a:rPr>
-              <a:t>中野ファンド6.12億＋パートナー13.44億</a:t>
+              <a:t>中野ファンド6.10億＋パートナー13.47億</a:t>
             </a:r>
             <a:endParaRPr lang="en-US" sz="1000" dirty="0"/>
           </a:p>
@@ -4946,7 +4946,7 @@
                 <a:ea typeface="Meiryo" pitchFamily="34" charset="-122"/>
                 <a:cs typeface="Meiryo" pitchFamily="34" charset="-120"/>
               </a:rPr>
-              <a:t>① エクイティ13.44億円の引受先のご紹介</a:t>
+              <a:t>① エクイティ13.47億円の引受先のご紹介</a:t>
             </a:r>
             <a:endParaRPr lang="en-US" sz="1150" dirty="0"/>
           </a:p>
@@ -7719,7 +7719,7 @@
                 <a:ea typeface="Meiryo" pitchFamily="34" charset="-122"/>
                 <a:cs typeface="Meiryo" pitchFamily="34" charset="-120"/>
               </a:rPr>
-              <a:t>中野ファンド 6.12億</a:t>
+              <a:t>中野ファンド 6.10億</a:t>
             </a:r>
             <a:endParaRPr lang="en-US" sz="950" dirty="0"/>
           </a:p>
@@ -7736,7 +7736,7 @@
                 <a:ea typeface="Meiryo" pitchFamily="34" charset="-122"/>
                 <a:cs typeface="Meiryo" pitchFamily="34" charset="-120"/>
               </a:rPr>
-              <a:t>パートナー 13.44億</a:t>
+              <a:t>パートナー 13.47億</a:t>
             </a:r>
             <a:endParaRPr lang="en-US" sz="950" dirty="0"/>
           </a:p>
@@ -8402,7 +8402,7 @@
                 <a:ea typeface="Meiryo" pitchFamily="34" charset="-122"/>
                 <a:cs typeface="Meiryo" pitchFamily="34" charset="-120"/>
               </a:rPr>
-              <a:t>取引後の株主は2者・中野陣営が単独筆頭</a:t>
+              <a:t>取引後の株主は2者のみ</a:t>
             </a:r>
             <a:endParaRPr lang="en-US" sz="1500" dirty="0"/>
           </a:p>
@@ -8480,7 +8480,7 @@
                 <a:ea typeface="Meiryo" pitchFamily="34" charset="-122"/>
                 <a:cs typeface="Meiryo" pitchFamily="34" charset="-120"/>
               </a:rPr>
-              <a:t>50.100%</a:t>
+              <a:t>50.000%</a:t>
             </a:r>
             <a:endParaRPr lang="en-US" sz="2400" dirty="0"/>
           </a:p>
@@ -8519,7 +8519,7 @@
                 <a:ea typeface="Meiryo" pitchFamily="34" charset="-122"/>
                 <a:cs typeface="Meiryo" pitchFamily="34" charset="-120"/>
               </a:rPr>
-              <a:t>中野邦人 74,000株（SO行使後）＋ 中野ファンド 61,451株</a:t>
+              <a:t>中野邦人 74,000株（SO行使後）＋ 中野ファンド 61,180株</a:t>
             </a:r>
             <a:endParaRPr lang="en-US" sz="950" dirty="0"/>
           </a:p>
@@ -8597,7 +8597,7 @@
                 <a:ea typeface="Meiryo" pitchFamily="34" charset="-122"/>
                 <a:cs typeface="Meiryo" pitchFamily="34" charset="-120"/>
               </a:rPr>
-              <a:t>49.900%</a:t>
+              <a:t>50.000%</a:t>
             </a:r>
             <a:endParaRPr lang="en-US" sz="2400" dirty="0"/>
           </a:p>
@@ -8636,7 +8636,7 @@
                 <a:ea typeface="Meiryo" pitchFamily="34" charset="-122"/>
                 <a:cs typeface="Meiryo" pitchFamily="34" charset="-120"/>
               </a:rPr>
-              <a:t>134,909株（ヒューリック／東京建物等を想定）</a:t>
+              <a:t>135,180株（東京建物等の芙蓉グループを想定）</a:t>
             </a:r>
             <a:endParaRPr lang="en-US" sz="950" dirty="0"/>
           </a:p>
@@ -9572,7 +9572,7 @@
                           <a:ea typeface="Meiryo" pitchFamily="34" charset="-122"/>
                           <a:cs typeface="Meiryo" pitchFamily="34" charset="-120"/>
                         </a:rPr>
-                        <a:t>61,451 株</a:t>
+                        <a:t>61,180 株</a:t>
                       </a:r>
                       <a:endParaRPr lang="en-US" sz="1150" dirty="0">
                         <a:latin typeface="Meiryo" charset="0"/>
@@ -9637,7 +9637,7 @@
                           <a:ea typeface="Meiryo" pitchFamily="34" charset="-122"/>
                           <a:cs typeface="Meiryo" pitchFamily="34" charset="-120"/>
                         </a:rPr>
-                        <a:t>22.729%</a:t>
+                        <a:t>22.629%</a:t>
                       </a:r>
                       <a:endParaRPr lang="en-US" sz="1150" dirty="0">
                         <a:latin typeface="Meiryo" charset="0"/>
@@ -9702,7 +9702,7 @@
                           <a:ea typeface="Meiryo" pitchFamily="34" charset="-122"/>
                           <a:cs typeface="Meiryo" pitchFamily="34" charset="-120"/>
                         </a:rPr>
-                        <a:t>6.12 億円</a:t>
+                        <a:t>6.10 億円</a:t>
                       </a:r>
                       <a:endParaRPr lang="en-US" sz="1150" dirty="0">
                         <a:latin typeface="Meiryo" charset="0"/>
@@ -9902,7 +9902,7 @@
                           <a:ea typeface="Meiryo" pitchFamily="34" charset="-122"/>
                           <a:cs typeface="Meiryo" pitchFamily="34" charset="-120"/>
                         </a:rPr>
-                        <a:t>135,451 株</a:t>
+                        <a:t>135,180 株</a:t>
                       </a:r>
                       <a:endParaRPr lang="en-US" sz="1150" dirty="0">
                         <a:latin typeface="Meiryo" charset="0"/>
@@ -9970,7 +9970,7 @@
                           <a:ea typeface="Meiryo" pitchFamily="34" charset="-122"/>
                           <a:cs typeface="Meiryo" pitchFamily="34" charset="-120"/>
                         </a:rPr>
-                        <a:t>50.100%</a:t>
+                        <a:t>50.000%</a:t>
                       </a:r>
                       <a:endParaRPr lang="en-US" sz="1150" dirty="0">
                         <a:latin typeface="Meiryo" charset="0"/>
@@ -10038,7 +10038,7 @@
                           <a:ea typeface="Meiryo" pitchFamily="34" charset="-122"/>
                           <a:cs typeface="Meiryo" pitchFamily="34" charset="-120"/>
                         </a:rPr>
-                        <a:t>6.12 億円</a:t>
+                        <a:t>6.10 億円</a:t>
                       </a:r>
                       <a:endParaRPr lang="en-US" sz="1150" dirty="0">
                         <a:latin typeface="Meiryo" charset="0"/>
@@ -10230,7 +10230,7 @@
                           <a:ea typeface="Meiryo" pitchFamily="34" charset="-122"/>
                           <a:cs typeface="Meiryo" pitchFamily="34" charset="-120"/>
                         </a:rPr>
-                        <a:t>134,909 株</a:t>
+                        <a:t>135,180 株</a:t>
                       </a:r>
                       <a:endParaRPr lang="en-US" sz="1150" dirty="0">
                         <a:latin typeface="Meiryo" charset="0"/>
@@ -10295,7 +10295,7 @@
                           <a:ea typeface="Meiryo" pitchFamily="34" charset="-122"/>
                           <a:cs typeface="Meiryo" pitchFamily="34" charset="-120"/>
                         </a:rPr>
-                        <a:t>49.900%</a:t>
+                        <a:t>50.000%</a:t>
                       </a:r>
                       <a:endParaRPr lang="en-US" sz="1150" dirty="0">
                         <a:latin typeface="Meiryo" charset="0"/>
@@ -10360,7 +10360,7 @@
                           <a:ea typeface="Meiryo" pitchFamily="34" charset="-122"/>
                           <a:cs typeface="Meiryo" pitchFamily="34" charset="-120"/>
                         </a:rPr>
-                        <a:t>13.44 億円</a:t>
+                        <a:t>13.47 億円</a:t>
                       </a:r>
                       <a:endParaRPr lang="en-US" sz="1150" dirty="0">
                         <a:latin typeface="Meiryo" charset="0"/>
@@ -10425,7 +10425,7 @@
                           <a:ea typeface="Meiryo" pitchFamily="34" charset="-122"/>
                           <a:cs typeface="Meiryo" pitchFamily="34" charset="-120"/>
                         </a:rPr>
-                        <a:t>ヒューリック／東京建物等を想定</a:t>
+                        <a:t>東京建物等の芙蓉グループを想定</a:t>
                       </a:r>
                       <a:endParaRPr lang="en-US" sz="1150" dirty="0">
                         <a:latin typeface="Meiryo" charset="0"/>
@@ -16469,7 +16469,7 @@
                 <a:ea typeface="Meiryo" pitchFamily="34" charset="-122"/>
                 <a:cs typeface="Meiryo" pitchFamily="34" charset="-120"/>
               </a:rPr>
-              <a:t>パートナー13.44億円の引受先として、ヒューリック・東京建物に加え、みずほキャピタル様やみずほグループのファンドをご紹介いただけないでしょうか。本件で最もお願いしたい点です。</a:t>
+              <a:t>パートナー13.47億円の引受先として、東京建物等の芙蓉グループに加え、みずほキャピタル様やみずほグループのファンドをご紹介いただけないでしょうか。本件で最もお願いしたい点です。なお12億円を下回ると債務超過を解消しきれず、規模を縮小した折衷案は成立しません。</a:t>
             </a:r>
             <a:endParaRPr lang="en-US" sz="1050" dirty="0"/>
           </a:p>
